--- a/Olist-E-Commerce-Analysis.pptx
+++ b/Olist-E-Commerce-Analysis.pptx
@@ -142,6 +142,228 @@
 </p:presentation>
 </file>
 
+<file path=ppt/charts/chart1.xml><?xml version="1.0" encoding="utf-8"?>
+<c:chartSpace xmlns:c="http://schemas.openxmlformats.org/drawingml/2006/chart" xmlns:a="http://schemas.openxmlformats.org/drawingml/2006/main" xmlns:r="http://schemas.openxmlformats.org/officeDocument/2006/relationships">
+  <c:date1904 val="0"/>
+  <c:chart>
+    <c:autoTitleDeleted val="1"/>
+    <c:plotArea>
+      <c:barChart>
+        <c:barDir val="bar"/>
+        <c:grouping val="clustered"/>
+        <c:varyColors val="0"/>
+        <c:ser>
+          <c:idx val="0"/>
+          <c:order val="0"/>
+          <c:tx>
+            <c:strRef>
+              <c:f>Sheet1!$B$1</c:f>
+              <c:strCache>
+                <c:ptCount val="1"/>
+                <c:pt idx="0">
+                  <c:v>Delivered Sales (R$ M)</c:v>
+                </c:pt>
+              </c:strCache>
+            </c:strRef>
+          </c:tx>
+          <c:spPr>
+            <a:solidFill>
+              <a:srgbClr val="8093A4"/>
+            </a:solidFill>
+          </c:spPr>
+          <c:dPt>
+            <c:idx val="5"/>
+            <c:spPr>
+              <a:solidFill>
+                <a:srgbClr val="0B7A85"/>
+              </a:solidFill>
+            </c:spPr>
+          </c:dPt>
+          <c:cat>
+            <c:strRef>
+              <c:f>Sheet1!$A$2:$A$7</c:f>
+              <c:strCache>
+                <c:ptCount val="6"/>
+                <c:pt idx="0">
+                  <c:v>Furniture &amp; Decor</c:v>
+                </c:pt>
+                <c:pt idx="1">
+                  <c:v>Computers &amp; Accessories</c:v>
+                </c:pt>
+                <c:pt idx="2">
+                  <c:v>Sports &amp; Leisure</c:v>
+                </c:pt>
+                <c:pt idx="3">
+                  <c:v>Bed, Bath &amp; Table</c:v>
+                </c:pt>
+                <c:pt idx="4">
+                  <c:v>Watches &amp; Gifts</c:v>
+                </c:pt>
+                <c:pt idx="5">
+                  <c:v>Health &amp; Beauty</c:v>
+                </c:pt>
+              </c:strCache>
+            </c:strRef>
+          </c:cat>
+          <c:val>
+            <c:numRef>
+              <c:f>Sheet1!$B$2:$B$7</c:f>
+              <c:numCache>
+                <c:formatCode>0.00</c:formatCode>
+                <c:ptCount val="6"/>
+                <c:pt idx="0">
+                  <c:v>0.71</c:v>
+                </c:pt>
+                <c:pt idx="1">
+                  <c:v>0.89</c:v>
+                </c:pt>
+                <c:pt idx="2">
+                  <c:v>0.95</c:v>
+                </c:pt>
+                <c:pt idx="3">
+                  <c:v>1.02</c:v>
+                </c:pt>
+                <c:pt idx="4">
+                  <c:v>1.17</c:v>
+                </c:pt>
+                <c:pt idx="5">
+                  <c:v>1.23</c:v>
+                </c:pt>
+              </c:numCache>
+            </c:numRef>
+          </c:val>
+        </c:ser>
+        <c:dLbls>
+          <c:numFmt formatCode="0.00" sourceLinked="0"/>
+          <c:txPr>
+            <a:bodyPr/>
+            <a:lstStyle/>
+            <a:p>
+              <a:pPr>
+                <a:defRPr sz="1100" b="1">
+                  <a:solidFill>
+                    <a:srgbClr val="FFFFFF"/>
+                  </a:solidFill>
+                </a:defRPr>
+              </a:pPr>
+            </a:p>
+          </c:txPr>
+          <c:dLblPos val="inEnd"/>
+          <c:showLegendKey val="0"/>
+          <c:showVal val="1"/>
+          <c:showCatName val="0"/>
+          <c:showSerName val="0"/>
+          <c:showPercent val="0"/>
+          <c:showBubbleSize val="0"/>
+          <c:showLeaderLines val="1"/>
+        </c:dLbls>
+        <c:gapWidth val="45"/>
+        <c:axId val="-2068027336"/>
+        <c:axId val="-2113994440"/>
+      </c:barChart>
+      <c:catAx>
+        <c:axId val="-2068027336"/>
+        <c:scaling>
+          <c:orientation val="minMax"/>
+        </c:scaling>
+        <c:delete val="0"/>
+        <c:axPos val="l"/>
+        <c:majorTickMark val="out"/>
+        <c:minorTickMark val="none"/>
+        <c:tickLblPos val="nextTo"/>
+        <c:spPr>
+          <a:ln>
+            <a:noFill/>
+          </a:ln>
+        </c:spPr>
+        <c:txPr>
+          <a:bodyPr/>
+          <a:lstStyle/>
+          <a:p>
+            <a:pPr>
+              <a:defRPr sz="1200"/>
+            </a:pPr>
+          </a:p>
+        </c:txPr>
+        <c:crossAx val="-2113994440"/>
+        <c:crosses val="autoZero"/>
+        <c:auto val="1"/>
+        <c:lblAlgn val="ctr"/>
+        <c:lblOffset val="100"/>
+        <c:noMultiLvlLbl val="0"/>
+      </c:catAx>
+      <c:valAx>
+        <c:axId val="-2113994440"/>
+        <c:scaling>
+          <c:max val="1.4"/>
+          <c:min val="0.0"/>
+        </c:scaling>
+        <c:delete val="0"/>
+        <c:axPos val="b"/>
+        <c:title>
+          <c:tx>
+            <c:rich>
+              <a:bodyPr/>
+              <a:lstStyle/>
+              <a:p>
+                <a:r>
+                  <a:rPr sz="1200" b="0">
+                    <a:latin typeface="Public Sans"/>
+                  </a:rPr>
+                  <a:t>Delivered Sales (R$ Millions)</a:t>
+                </a:r>
+              </a:p>
+            </c:rich>
+          </c:tx>
+          <c:layout/>
+          <c:overlay val="0"/>
+        </c:title>
+        <c:numFmt formatCode="0.0" sourceLinked="0"/>
+        <c:majorTickMark val="out"/>
+        <c:minorTickMark val="none"/>
+        <c:tickLblPos val="nextTo"/>
+        <c:spPr>
+          <a:ln>
+            <a:noFill/>
+          </a:ln>
+        </c:spPr>
+        <c:txPr>
+          <a:bodyPr/>
+          <a:lstStyle/>
+          <a:p>
+            <a:pPr>
+              <a:defRPr sz="1100"/>
+            </a:pPr>
+          </a:p>
+        </c:txPr>
+        <c:crossAx val="-2068027336"/>
+        <c:crosses val="autoZero"/>
+        <c:majorUnit val="0.2"/>
+      </c:valAx>
+    </c:plotArea>
+    <c:dispBlanksAs val="gap"/>
+  </c:chart>
+  <c:txPr>
+    <a:bodyPr/>
+    <a:lstStyle/>
+    <a:p>
+      <a:pPr>
+        <a:defRPr sz="1200">
+          <a:solidFill>
+            <a:srgbClr val="1B2632"/>
+          </a:solidFill>
+          <a:latin typeface="Public Sans"/>
+        </a:defRPr>
+      </a:pPr>
+      <a:endParaRPr lang="en-US"/>
+    </a:p>
+  </c:txPr>
+  <c:externalData r:id="rId1">
+    <c:autoUpdate val="0"/>
+  </c:externalData>
+</c:chartSpace>
+</file>
+
 <file path=ppt/notesMasters/notesMaster1.xml><?xml version="1.0" encoding="utf-8"?>
 <p:notesMaster xmlns:a="http://schemas.openxmlformats.org/drawingml/2006/main" xmlns:r="http://schemas.openxmlformats.org/officeDocument/2006/relationships" xmlns:p="http://schemas.openxmlformats.org/presentationml/2006/main">
   <p:cSld>
@@ -624,10 +846,8 @@
           <a:lstStyle/>
           <a:p>
             <a:r>
-              <a:rPr lang="en-US" dirty="0"/>
-              <a:t>Synthesize the analysis into three actionable business priorities: category protection, targeted regional logistics remediation, and positioning fulfillment reliability as the primary lever for customer retention.</a:t>
-            </a:r>
-            <a:endParaRPr lang="en-US" dirty="0"/>
+              <a:t>Summarize three priorities: protect the top revenue categories, look into the states with the highest late-delivery rates, and treat delivery reliability as the first lever for customer satisfaction. Remind the audience these are suggestions based on observed patterns.</a:t>
+            </a:r>
           </a:p>
         </p:txBody>
       </p:sp>
@@ -712,10 +932,8 @@
           <a:lstStyle/>
           <a:p>
             <a:r>
-              <a:rPr lang="en-US" dirty="0"/>
-              <a:t>Outline the four analytical themes: commercial volume, category leadership, one-time customer behavior, and fulfillment friction connecting directly to review sentiment.</a:t>
-            </a:r>
-            <a:endParaRPr lang="en-US" dirty="0"/>
+              <a:t>Outline the four analytical themes: sales over time, category leadership, one-time vs repeat customers, and delivery performance and its relationship with review scores.</a:t>
+            </a:r>
           </a:p>
         </p:txBody>
       </p:sp>
@@ -976,10 +1194,8 @@
           <a:lstStyle/>
           <a:p>
             <a:r>
-              <a:rPr lang="en-US" dirty="0"/>
-              <a:t>Walk the sales expansion: delivered orders totaled R$13.22M across 96,478 orders, averaging R$137.04. Highlight the 2017 ramp and November peak (R$1.01M) while cautioning that early triple-digit growth reflects tiny initial volume.</a:t>
-            </a:r>
-            <a:endParaRPr lang="en-US" dirty="0"/>
+              <a:t>Walk the sales expansion: delivered orders totaled R$13.22M across 96,478 orders, averaging R$137.04. Highlight the 2017 ramp and that November 2017 was the highest month, while cautioning that early large percentage growth reflects a tiny initial volume.</a:t>
+            </a:r>
           </a:p>
         </p:txBody>
       </p:sp>
@@ -1064,10 +1280,8 @@
           <a:lstStyle/>
           <a:p>
             <a:r>
-              <a:rPr lang="en-US" dirty="0"/>
-              <a:t>Present the category leaderboard: Health &amp; Beauty (R$1.26M), Watches &amp; Gifts (R$1.17M), and Bed Bath Table (R$1.04M) lead. Note how catalog volume is concentrated among these top sectors.</a:t>
-            </a:r>
-            <a:endParaRPr lang="en-US" dirty="0"/>
+              <a:t>Present the category leaderboard: Health &amp; Beauty (R$1.23M), Watches &amp; Gifts (R$1.17M), and Bed Bath Table (R$1.02M) lead. Note how catalog volume is concentrated among these top sectors.</a:t>
+            </a:r>
           </a:p>
         </p:txBody>
       </p:sp>
@@ -1152,10 +1366,8 @@
           <a:lstStyle/>
           <a:p>
             <a:r>
-              <a:rPr lang="en-US" dirty="0"/>
-              <a:t>Contrast one-time buyers (97%) against repeat customers (3%). Highlight that repeat buyers spend nearly double across their relationship, while clearly articulating the observation-window limitation.</a:t>
-            </a:r>
-            <a:endParaRPr lang="en-US" dirty="0"/>
+              <a:t>Contrast one-time buyers (97%) against repeat customers (3%). Repeat customers had higher average spending per customer, but the group is much smaller and the observation period is limited.</a:t>
+            </a:r>
           </a:p>
         </p:txBody>
       </p:sp>
@@ -1240,10 +1452,8 @@
           <a:lstStyle/>
           <a:p>
             <a:r>
-              <a:rPr lang="en-US" dirty="0"/>
-              <a:t>Break down fulfillment friction: average shipping takes 12.5 days with an 8.11% delay rate overall. Note extreme geographic disparity: SP sits at 5.4% late, whereas RJ reaches 11.6% and AL exceeds 23%.</a:t>
-            </a:r>
-            <a:endParaRPr lang="en-US" dirty="0"/>
+              <a:t>Break down fulfillment friction: average shipping takes 12.5 days with an 8.11% delay rate overall. Note the geographic disparity: late rates are highest in Northeast states, led by AL (23.93%) and MA (19.67%).</a:t>
+            </a:r>
           </a:p>
         </p:txBody>
       </p:sp>
@@ -1328,10 +1538,8 @@
           <a:lstStyle/>
           <a:p>
             <a:r>
-              <a:rPr lang="en-US" dirty="0"/>
-              <a:t>Focus on the central customer experience insight: on-time orders score 4.29, while late orders collapse to 2.57. Explicitly state the methodological caveat that this is a strong association, not proof that delay is the sole causal driver.</a:t>
-            </a:r>
-            <a:endParaRPr lang="en-US" dirty="0"/>
+              <a:t>Focus on the central customer experience insight: on-time orders average 4.29, while late orders average 2.57. State the caveat that this is a strong association, not proof that delay is the sole cause.</a:t>
+            </a:r>
           </a:p>
         </p:txBody>
       </p:sp>
@@ -1504,32 +1712,6 @@
           <a:ln/>
         </p:spPr>
       </p:sp>
-      <p:pic>
-        <p:nvPicPr>
-          <p:cNvPr id="6" name="Image 1" descr="preencoded.png">
-            <a:hlinkClick r:id="rId3" tooltip=""/>
-          </p:cNvPr>
-          <p:cNvPicPr>
-            <a:picLocks noChangeAspect="1"/>
-          </p:cNvPicPr>
-          <p:nvPr/>
-        </p:nvPicPr>
-        <p:blipFill>
-          <a:blip r:embed="rId2"/>
-          <a:stretch>
-            <a:fillRect/>
-          </a:stretch>
-        </p:blipFill>
-        <p:spPr>
-          <a:xfrm>
-            <a:off x="11076875" y="6558991"/>
-            <a:ext cx="1071843" cy="256032"/>
-          </a:xfrm>
-          <a:prstGeom prst="rect">
-            <a:avLst/>
-          </a:prstGeom>
-        </p:spPr>
-      </p:pic>
     </p:spTree>
   </p:cSld>
   <p:clrMapOvr>
@@ -1595,32 +1777,6 @@
           <a:ln/>
         </p:spPr>
       </p:sp>
-      <p:pic>
-        <p:nvPicPr>
-          <p:cNvPr id="4" name="Image 0" descr="preencoded.png">
-            <a:hlinkClick r:id="rId2" tooltip=""/>
-          </p:cNvPr>
-          <p:cNvPicPr>
-            <a:picLocks noChangeAspect="1"/>
-          </p:cNvPicPr>
-          <p:nvPr/>
-        </p:nvPicPr>
-        <p:blipFill>
-          <a:blip r:embed="rId1"/>
-          <a:stretch>
-            <a:fillRect/>
-          </a:stretch>
-        </p:blipFill>
-        <p:spPr>
-          <a:xfrm>
-            <a:off x="11076875" y="6558991"/>
-            <a:ext cx="1071843" cy="256032"/>
-          </a:xfrm>
-          <a:prstGeom prst="rect">
-            <a:avLst/>
-          </a:prstGeom>
-        </p:spPr>
-      </p:pic>
     </p:spTree>
   </p:cSld>
   <p:clrMapOvr>
@@ -2370,7 +2526,7 @@
                 <a:ea typeface="Public Sans" pitchFamily="34" charset="-122"/>
                 <a:cs typeface="Public Sans" pitchFamily="34" charset="-120"/>
               </a:rPr>
-              <a:t>Maintain tight stock availability, seller SLA adherence, and promo visibility across Health &amp; Beauty, Watches &amp; Gifts, and Bed, Bath &amp; Table.</a:t>
+              <a:t>Keep delivery and availability strong in Health &amp; Beauty, Watches &amp; Gifts, and Bed, Bath &amp; Table, which drive the most revenue.</a:t>
             </a:r>
             <a:endParaRPr lang="en-US" sz="1450" dirty="0"/>
           </a:p>
@@ -2454,7 +2610,7 @@
                 <a:ea typeface="Public Sans" pitchFamily="34" charset="-122"/>
                 <a:cs typeface="Public Sans" pitchFamily="34" charset="-120"/>
               </a:rPr>
-              <a:t>Investigate high-delay shipping corridors</a:t>
+              <a:t>Investigate high late-delivery regions</a:t>
             </a:r>
             <a:endParaRPr lang="en-US" sz="1800" dirty="0"/>
           </a:p>
@@ -2498,7 +2654,7 @@
                 <a:ea typeface="Public Sans" pitchFamily="34" charset="-122"/>
                 <a:cs typeface="Public Sans" pitchFamily="34" charset="-120"/>
               </a:rPr>
-              <a:t>Audit regional transit carriers and postal partner SLAs in Rio de Janeiro (11.6% late) and Northeast routes (AL 23.1%, BA 15.9%) to align delivery estimates.</a:t>
+              <a:t>Look into what drives higher late-delivery rates in AL (23.93%), MA (19.67%), BA (14.04%) and Rio de Janeiro (13.47%).</a:t>
             </a:r>
             <a:endParaRPr lang="en-US" sz="1450" dirty="0"/>
           </a:p>
@@ -2582,7 +2738,7 @@
                 <a:ea typeface="Public Sans" pitchFamily="34" charset="-122"/>
                 <a:cs typeface="Public Sans" pitchFamily="34" charset="-120"/>
               </a:rPr>
-              <a:t>Treat delivery reliability as satisfaction driver</a:t>
+              <a:t>Treat delivery reliability as a priority</a:t>
             </a:r>
             <a:endParaRPr lang="en-US" sz="1800" dirty="0"/>
           </a:p>
@@ -2626,7 +2782,7 @@
                 <a:ea typeface="Public Sans" pitchFamily="34" charset="-122"/>
                 <a:cs typeface="Public Sans" pitchFamily="34" charset="-120"/>
               </a:rPr>
-              <a:t>Address delivery friction directly to protect seller ratings and unlock lifetime repeat purchasing beyond the current 3% repeat customer benchmark.</a:t>
+              <a:t>Late orders had much lower review scores, so improving on-time delivery is a sensible first step toward better satisfaction and repeat purchases.</a:t>
             </a:r>
             <a:endParaRPr lang="en-US" sz="1450" dirty="0"/>
           </a:p>
@@ -2670,7 +2826,7 @@
                 <a:ea typeface="Public Sans" pitchFamily="34" charset="-122"/>
                 <a:cs typeface="Public Sans" pitchFamily="34" charset="-120"/>
               </a:rPr>
-              <a:t>Preserving the distinction between observed evidence and operational recommendations.</a:t>
+              <a:t>Recommendations are suggestions based on observed patterns, not proven causes.</a:t>
             </a:r>
             <a:endParaRPr lang="en-US" sz="1250" dirty="0"/>
           </a:p>
@@ -2719,6 +2875,10 @@
           </a:solidFill>
           <a:ln/>
         </p:spPr>
+        <p:txBody>
+          <a:bodyPr/>
+          <a:p/>
+        </p:txBody>
       </p:sp>
       <p:sp>
         <p:nvSpPr>
@@ -2800,7 +2960,7 @@
                 <a:ea typeface="Public Sans" pitchFamily="34" charset="-122"/>
                 <a:cs typeface="Public Sans" pitchFamily="34" charset="-120"/>
               </a:rPr>
-              <a:t>Sustainable marketplace expansion depends on pairing catalog sales volume with predictable fulfillment standards.</a:t>
+              <a:t>Delivery reliability showed the clearest link to customer satisfaction in this data, making it a sensible first focus.</a:t>
             </a:r>
             <a:endParaRPr lang="en-US" sz="1450" dirty="0"/>
           </a:p>
@@ -3077,7 +3237,7 @@
                 <a:ea typeface="Public Sans" pitchFamily="34" charset="-122"/>
                 <a:cs typeface="Public Sans" pitchFamily="34" charset="-120"/>
               </a:rPr>
-              <a:t>Revenue trajectory, peak monthly volumes, and seasonality patterns across 2016–2018.</a:t>
+              <a:t>Revenue over time, the peak month, and month-to-month changes across 2016–2018.</a:t>
             </a:r>
             <a:endParaRPr lang="en-US" sz="1450" dirty="0"/>
           </a:p>
@@ -3205,7 +3365,7 @@
                 <a:ea typeface="Public Sans" pitchFamily="34" charset="-122"/>
                 <a:cs typeface="Public Sans" pitchFamily="34" charset="-120"/>
               </a:rPr>
-              <a:t>Value contributions, top revenue drivers, and catalogue breadth across translated categories.</a:t>
+              <a:t>Delivered revenue by product category and the top revenue drivers.</a:t>
             </a:r>
             <a:endParaRPr lang="en-US" sz="1450" dirty="0"/>
           </a:p>
@@ -3333,7 +3493,7 @@
                 <a:ea typeface="Public Sans" pitchFamily="34" charset="-122"/>
                 <a:cs typeface="Public Sans" pitchFamily="34" charset="-120"/>
               </a:rPr>
-              <a:t>Repeat rate benchmarks, customer spending distribution, and observation-window considerations.</a:t>
+              <a:t>One-time vs repeat customers, spending per customer, and observation-period limits.</a:t>
             </a:r>
             <a:endParaRPr lang="en-US" sz="1450" dirty="0"/>
           </a:p>
@@ -3461,7 +3621,7 @@
                 <a:ea typeface="Public Sans" pitchFamily="34" charset="-122"/>
                 <a:cs typeface="Public Sans" pitchFamily="34" charset="-120"/>
               </a:rPr>
-              <a:t>Delivery timelines, state-level late rates, and their correlation with review scores.</a:t>
+              <a:t>Delivery times, state-level late rates, and how they relate to review scores.</a:t>
             </a:r>
             <a:endParaRPr lang="en-US" sz="1450" dirty="0"/>
           </a:p>
@@ -3510,6 +3670,10 @@
           </a:solidFill>
           <a:ln/>
         </p:spPr>
+        <p:txBody>
+          <a:bodyPr/>
+          <a:p/>
+        </p:txBody>
       </p:sp>
       <p:sp>
         <p:nvSpPr>
@@ -3549,7 +3713,7 @@
                 <a:ea typeface="Public Sans Bold" pitchFamily="34" charset="-122"/>
                 <a:cs typeface="Public Sans Bold" pitchFamily="34" charset="-120"/>
               </a:rPr>
-              <a:t>Analytical workflow:</a:t>
+              <a:t>Analytical workflow: data cleaned and checked with Python &amp; pandas, analysed with SQL in PostgreSQL, and presented in Power BI.</a:t>
             </a:r>
             <a:pPr algn="l" indent="0" marL="0">
               <a:lnSpc>
@@ -3557,119 +3721,42 @@
               </a:lnSpc>
               <a:buNone/>
             </a:pPr>
-            <a:r>
-              <a:rPr lang="en-US" sz="1450" dirty="0">
-                <a:solidFill>
-                  <a:srgbClr val="3A4756"/>
-                </a:solidFill>
-                <a:latin typeface="Public Sans" pitchFamily="34" charset="0"/>
-                <a:ea typeface="Public Sans" pitchFamily="34" charset="-122"/>
-                <a:cs typeface="Public Sans" pitchFamily="34" charset="-120"/>
-              </a:rPr>
-              <a:t> Raw relational schemas processed via </a:t>
-            </a:r>
             <a:pPr algn="l" indent="0" marL="0">
               <a:lnSpc>
                 <a:spcPct val="121000"/>
               </a:lnSpc>
               <a:buNone/>
             </a:pPr>
-            <a:r>
-              <a:rPr lang="en-US" sz="1450" b="1" dirty="0">
-                <a:solidFill>
-                  <a:srgbClr val="3A4756"/>
-                </a:solidFill>
-                <a:latin typeface="Public Sans Bold" pitchFamily="34" charset="0"/>
-                <a:ea typeface="Public Sans Bold" pitchFamily="34" charset="-122"/>
-                <a:cs typeface="Public Sans Bold" pitchFamily="34" charset="-120"/>
-              </a:rPr>
-              <a:t>Python &amp; pandas</a:t>
-            </a:r>
             <a:pPr algn="l" indent="0" marL="0">
               <a:lnSpc>
                 <a:spcPct val="121000"/>
               </a:lnSpc>
               <a:buNone/>
             </a:pPr>
-            <a:r>
-              <a:rPr lang="en-US" sz="1450" dirty="0">
-                <a:solidFill>
-                  <a:srgbClr val="3A4756"/>
-                </a:solidFill>
-                <a:latin typeface="Public Sans" pitchFamily="34" charset="0"/>
-                <a:ea typeface="Public Sans" pitchFamily="34" charset="-122"/>
-                <a:cs typeface="Public Sans" pitchFamily="34" charset="-120"/>
-              </a:rPr>
-              <a:t>, validated in </a:t>
-            </a:r>
             <a:pPr algn="l" indent="0" marL="0">
               <a:lnSpc>
                 <a:spcPct val="121000"/>
               </a:lnSpc>
               <a:buNone/>
             </a:pPr>
-            <a:r>
-              <a:rPr lang="en-US" sz="1450" b="1" dirty="0">
-                <a:solidFill>
-                  <a:srgbClr val="3A4756"/>
-                </a:solidFill>
-                <a:latin typeface="Public Sans Bold" pitchFamily="34" charset="0"/>
-                <a:ea typeface="Public Sans Bold" pitchFamily="34" charset="-122"/>
-                <a:cs typeface="Public Sans Bold" pitchFamily="34" charset="-120"/>
-              </a:rPr>
-              <a:t>PostgreSQL</a:t>
-            </a:r>
             <a:pPr algn="l" indent="0" marL="0">
               <a:lnSpc>
                 <a:spcPct val="121000"/>
               </a:lnSpc>
               <a:buNone/>
             </a:pPr>
-            <a:r>
-              <a:rPr lang="en-US" sz="1450" dirty="0">
-                <a:solidFill>
-                  <a:srgbClr val="3A4756"/>
-                </a:solidFill>
-                <a:latin typeface="Public Sans" pitchFamily="34" charset="0"/>
-                <a:ea typeface="Public Sans" pitchFamily="34" charset="-122"/>
-                <a:cs typeface="Public Sans" pitchFamily="34" charset="-120"/>
-              </a:rPr>
-              <a:t>, and modeled for exploratory review in </a:t>
-            </a:r>
             <a:pPr algn="l" indent="0" marL="0">
               <a:lnSpc>
                 <a:spcPct val="121000"/>
               </a:lnSpc>
               <a:buNone/>
             </a:pPr>
-            <a:r>
-              <a:rPr lang="en-US" sz="1450" b="1" dirty="0">
-                <a:solidFill>
-                  <a:srgbClr val="3A4756"/>
-                </a:solidFill>
-                <a:latin typeface="Public Sans Bold" pitchFamily="34" charset="0"/>
-                <a:ea typeface="Public Sans Bold" pitchFamily="34" charset="-122"/>
-                <a:cs typeface="Public Sans Bold" pitchFamily="34" charset="-120"/>
-              </a:rPr>
-              <a:t>Power BI</a:t>
-            </a:r>
             <a:pPr algn="l" indent="0" marL="0">
               <a:lnSpc>
                 <a:spcPct val="121000"/>
               </a:lnSpc>
               <a:buNone/>
             </a:pPr>
-            <a:r>
-              <a:rPr lang="en-US" sz="1450" dirty="0">
-                <a:solidFill>
-                  <a:srgbClr val="3A4756"/>
-                </a:solidFill>
-                <a:latin typeface="Public Sans" pitchFamily="34" charset="0"/>
-                <a:ea typeface="Public Sans" pitchFamily="34" charset="-122"/>
-                <a:cs typeface="Public Sans" pitchFamily="34" charset="-120"/>
-              </a:rPr>
-              <a:t>.</a:t>
-            </a:r>
             <a:endParaRPr lang="en-US" sz="1450" dirty="0"/>
           </a:p>
         </p:txBody>
@@ -6006,7 +6093,7 @@
                           <a:ea typeface="Public Sans" pitchFamily="34" charset="-122"/>
                           <a:cs typeface="Public Sans" pitchFamily="34" charset="-120"/>
                         </a:rPr>
-                        <a:t>Checked review IDs; audited multi-item order occurrences and distinct survey submissions.</a:t>
+                        <a:t>Checked review IDs instead of assuming one ID per order; confirmed that orders can contain multiple items.</a:t>
                       </a:r>
                       <a:endParaRPr lang="en-US" sz="1450" dirty="0">
                         <a:latin typeface="Public Sans" charset="0"/>
@@ -6530,7 +6617,7 @@
                           <a:ea typeface="Public Sans" pitchFamily="34" charset="-122"/>
                           <a:cs typeface="Public Sans" pitchFamily="34" charset="-120"/>
                         </a:rPr>
-                        <a:t>Excluded cancelled, unavailable, or missing delivery timestamps only when they affected calculations.</a:t>
+                        <a:t>Investigated delivery-date anomalies; excluded them only when they affected delivery calculations.</a:t>
                       </a:r>
                       <a:endParaRPr lang="en-US" sz="1450" dirty="0">
                         <a:latin typeface="Public Sans" charset="0"/>
@@ -6595,7 +6682,7 @@
                           <a:ea typeface="Public Sans" pitchFamily="34" charset="-122"/>
                           <a:cs typeface="Public Sans" pitchFamily="34" charset="-120"/>
                         </a:rPr>
-                        <a:t>Uses validated delivery records; prevents negative durations and unclosed fulfillment bias.</a:t>
+                        <a:t>Keeps delivery-time metrics reliable without discarding valid orders.</a:t>
                       </a:r>
                       <a:endParaRPr lang="en-US" sz="1450" dirty="0">
                         <a:latin typeface="Public Sans" charset="0"/>
@@ -6776,6 +6863,10 @@
           </a:solidFill>
           <a:ln/>
         </p:spPr>
+        <p:txBody>
+          <a:bodyPr/>
+          <a:p/>
+        </p:txBody>
       </p:sp>
       <p:sp>
         <p:nvSpPr>
@@ -6922,6 +7013,10 @@
           </a:solidFill>
           <a:ln/>
         </p:spPr>
+        <p:txBody>
+          <a:bodyPr/>
+          <a:p/>
+        </p:txBody>
       </p:sp>
       <p:sp>
         <p:nvSpPr>
@@ -7068,6 +7163,10 @@
           </a:solidFill>
           <a:ln/>
         </p:spPr>
+        <p:txBody>
+          <a:bodyPr/>
+          <a:p/>
+        </p:txBody>
       </p:sp>
       <p:sp>
         <p:nvSpPr>
@@ -7195,30 +7294,6 @@
           </a:p>
         </p:txBody>
       </p:sp>
-      <p:pic>
-        <p:nvPicPr>
-          <p:cNvPr id="15" name="Image 0" descr="preencoded.png">    </p:cNvPr>
-          <p:cNvPicPr>
-            <a:picLocks noChangeAspect="1"/>
-          </p:cNvPicPr>
-          <p:nvPr/>
-        </p:nvPicPr>
-        <p:blipFill>
-          <a:blip r:embed="rId1"/>
-          <a:stretch>
-            <a:fillRect/>
-          </a:stretch>
-        </p:blipFill>
-        <p:spPr>
-          <a:xfrm>
-            <a:off x="609585" y="2998291"/>
-            <a:ext cx="10794730" cy="2794000"/>
-          </a:xfrm>
-          <a:prstGeom prst="rect">
-            <a:avLst/>
-          </a:prstGeom>
-        </p:spPr>
-      </p:pic>
       <p:sp>
         <p:nvSpPr>
           <p:cNvPr id="16" name="Text 13"/>
@@ -7257,7 +7332,7 @@
                 <a:ea typeface="Public Sans" pitchFamily="34" charset="-122"/>
                 <a:cs typeface="Public Sans" pitchFamily="34" charset="-120"/>
               </a:rPr>
-              <a:t>Early 2017 percentage growth was amplified by a small base; November 2017 delivered sales reached R$1.01M during Black Friday promotions.</a:t>
+              <a:t>Early-2017 percentage growth was amplified by a very small base, so it is not treated as a meaningful trend.</a:t>
             </a:r>
             <a:endParaRPr lang="en-US" sz="1250" dirty="0"/>
           </a:p>
@@ -7302,6 +7377,85 @@
               <a:t>05</a:t>
             </a:r>
             <a:endParaRPr lang="en-US" sz="1100" dirty="0"/>
+          </a:p>
+        </p:txBody>
+      </p:sp>
+      <p:pic>
+        <p:nvPicPr>
+          <p:cNvPr id="18" name="Picture 17" descr="monthly.png"/>
+          <p:cNvPicPr>
+            <a:picLocks noChangeAspect="1"/>
+          </p:cNvPicPr>
+          <p:nvPr/>
+        </p:nvPicPr>
+        <p:blipFill>
+          <a:blip r:embed="rId4"/>
+          <a:stretch>
+            <a:fillRect/>
+          </a:stretch>
+        </p:blipFill>
+        <p:spPr>
+          <a:xfrm>
+            <a:off x="609585" y="2998291"/>
+            <a:ext cx="5352194" cy="2798064"/>
+          </a:xfrm>
+          <a:prstGeom prst="rect">
+            <a:avLst/>
+          </a:prstGeom>
+        </p:spPr>
+      </p:pic>
+      <p:sp>
+        <p:nvSpPr>
+          <p:cNvPr id="19" name="TextBox 18"/>
+          <p:cNvSpPr txBox="1"/>
+          <p:nvPr/>
+        </p:nvSpPr>
+        <p:spPr>
+          <a:xfrm>
+            <a:off x="6418979" y="3501211"/>
+            <a:ext cx="4572000" cy="1828800"/>
+          </a:xfrm>
+          <a:prstGeom prst="rect">
+            <a:avLst/>
+          </a:prstGeom>
+          <a:noFill/>
+        </p:spPr>
+        <p:txBody>
+          <a:bodyPr wrap="square">
+            <a:spAutoFit/>
+          </a:bodyPr>
+          <a:lstStyle/>
+          <a:p>
+            <a:pPr>
+              <a:spcAft>
+                <a:spcPts val="1200"/>
+              </a:spcAft>
+            </a:pPr>
+            <a:r>
+              <a:rPr sz="1600">
+                <a:solidFill>
+                  <a:srgbClr val="1B2632"/>
+                </a:solidFill>
+                <a:latin typeface="Public Sans"/>
+              </a:rPr>
+              <a:t>Delivered sales rose through 2017, with some month-to-month dips.</a:t>
+            </a:r>
+          </a:p>
+          <a:p>
+            <a:pPr>
+              <a:spcAft>
+                <a:spcPts val="1200"/>
+              </a:spcAft>
+            </a:pPr>
+            <a:r>
+              <a:rPr sz="1600">
+                <a:solidFill>
+                  <a:srgbClr val="1B2632"/>
+                </a:solidFill>
+                <a:latin typeface="Public Sans"/>
+              </a:rPr>
+              <a:t>November 2017 was the highest month in the dataset.</a:t>
+            </a:r>
           </a:p>
         </p:txBody>
       </p:sp>
@@ -7372,30 +7526,6 @@
           </a:p>
         </p:txBody>
       </p:sp>
-      <p:pic>
-        <p:nvPicPr>
-          <p:cNvPr id="3" name="Image 0" descr="preencoded.png">    </p:cNvPr>
-          <p:cNvPicPr>
-            <a:picLocks noChangeAspect="1"/>
-          </p:cNvPicPr>
-          <p:nvPr/>
-        </p:nvPicPr>
-        <p:blipFill>
-          <a:blip r:embed="rId1"/>
-          <a:stretch>
-            <a:fillRect/>
-          </a:stretch>
-        </p:blipFill>
-        <p:spPr>
-          <a:xfrm>
-            <a:off x="609585" y="1573709"/>
-            <a:ext cx="6476838" cy="3683000"/>
-          </a:xfrm>
-          <a:prstGeom prst="rect">
-            <a:avLst/>
-          </a:prstGeom>
-        </p:spPr>
-      </p:pic>
       <p:sp>
         <p:nvSpPr>
           <p:cNvPr id="4" name="Text 1"/>
@@ -7434,7 +7564,7 @@
                 <a:ea typeface="Public Sans" pitchFamily="34" charset="-122"/>
                 <a:cs typeface="Public Sans" pitchFamily="34" charset="-120"/>
               </a:rPr>
-              <a:t>The top three product categories generated over R$3.47M, representing more than 26% of all marketplace sales.</a:t>
+              <a:t>The top three product categories generated about R$3.4M, representing roughly 26% of all marketplace sales.</a:t>
             </a:r>
             <a:endParaRPr lang="en-US" sz="1250" dirty="0"/>
           </a:p>
@@ -7520,7 +7650,7 @@
                 <a:ea typeface="Public Sans" pitchFamily="34" charset="-122"/>
                 <a:cs typeface="Public Sans" pitchFamily="34" charset="-120"/>
               </a:rPr>
-              <a:t>Top 6 categories anchor marketplace turnover</a:t>
+              <a:t>Six categories lead delivered revenue</a:t>
             </a:r>
             <a:endParaRPr lang="en-US" sz="2400" dirty="0"/>
           </a:p>
@@ -7564,7 +7694,7 @@
                 <a:ea typeface="Public Sans" pitchFamily="34" charset="-122"/>
                 <a:cs typeface="Public Sans" pitchFamily="34" charset="-120"/>
               </a:rPr>
-              <a:t>Revenue is concentrated in personal care, giftware, and home furnishings. While Olist lists over 70 translated categories, commercial liquidity relies heavily on the top ten segments.</a:t>
+              <a:t>Health &amp; beauty, watches &amp; gifts and bed &amp; bath table lead, followed by sports &amp; leisure, computers &amp; accessories and furniture &amp; decor.</a:t>
             </a:r>
             <a:endParaRPr lang="en-US" sz="1450" dirty="0"/>
           </a:p>
@@ -7589,6 +7719,10 @@
           </a:solidFill>
           <a:ln/>
         </p:spPr>
+        <p:txBody>
+          <a:bodyPr/>
+          <a:p/>
+        </p:txBody>
       </p:sp>
       <p:sp>
         <p:nvSpPr>
@@ -7670,7 +7804,7 @@
                 <a:ea typeface="Public Sans" pitchFamily="34" charset="-122"/>
                 <a:cs typeface="Public Sans" pitchFamily="34" charset="-120"/>
               </a:rPr>
-              <a:t>Fulfillment failures or stockouts in Health &amp; Beauty or Watches &amp; Gifts disproportionately damage marketplace revenue.</a:t>
+              <a:t>As the biggest revenue drivers, these categories are a sensible place to focus delivery and availability.</a:t>
             </a:r>
             <a:endParaRPr lang="en-US" sz="1450" dirty="0"/>
           </a:p>
@@ -7718,6 +7852,24 @@
           </a:p>
         </p:txBody>
       </p:sp>
+      <p:graphicFrame>
+        <p:nvGraphicFramePr>
+          <p:cNvPr id="12" name="Chart 11"/>
+          <p:cNvGraphicFramePr>
+            <a:graphicFrameLocks noGrp="1"/>
+          </p:cNvGraphicFramePr>
+          <p:nvPr/>
+        </p:nvGraphicFramePr>
+        <p:xfrm>
+          <a:off x="609585" y="1573709"/>
+          <a:ext cx="6476838" cy="3683000"/>
+        </p:xfrm>
+        <a:graphic>
+          <a:graphicData uri="http://schemas.openxmlformats.org/drawingml/2006/chart">
+            <c:chart xmlns:c="http://schemas.openxmlformats.org/drawingml/2006/chart" r:id="rId4"/>
+          </a:graphicData>
+        </a:graphic>
+      </p:graphicFrame>
     </p:spTree>
   </p:cSld>
   <p:clrMapOvr>
@@ -7849,7 +8001,7 @@
                 <a:ea typeface="Public Sans" pitchFamily="34" charset="-122"/>
                 <a:cs typeface="Public Sans" pitchFamily="34" charset="-120"/>
               </a:rPr>
-              <a:t>93,358 unique customers placed orders; approximately 97% purchased only once in the dataset window.</a:t>
+              <a:t>About 93.4K customers placed delivered orders; roughly 97% purchased only once during the period.</a:t>
             </a:r>
             <a:endParaRPr lang="en-US" sz="1250" dirty="0"/>
           </a:p>
@@ -7874,6 +8026,10 @@
           </a:solidFill>
           <a:ln/>
         </p:spPr>
+        <p:txBody>
+          <a:bodyPr/>
+          <a:p/>
+        </p:txBody>
       </p:sp>
       <p:sp>
         <p:nvSpPr>
@@ -7997,7 +8153,7 @@
                 <a:ea typeface="Public Sans" pitchFamily="34" charset="-122"/>
                 <a:cs typeface="Public Sans" pitchFamily="34" charset="-120"/>
               </a:rPr>
-              <a:t>R$ 136.60 average spend per customer</a:t>
+              <a:t>About 91K customers</a:t>
             </a:r>
             <a:endParaRPr lang="en-US" sz="1450" dirty="0"/>
           </a:p>
@@ -8022,6 +8178,10 @@
           </a:solidFill>
           <a:ln/>
         </p:spPr>
+        <p:txBody>
+          <a:bodyPr/>
+          <a:p/>
+        </p:txBody>
       </p:sp>
       <p:sp>
         <p:nvSpPr>
@@ -8145,7 +8305,7 @@
                 <a:ea typeface="Public Sans" pitchFamily="34" charset="-122"/>
                 <a:cs typeface="Public Sans" pitchFamily="34" charset="-120"/>
               </a:rPr>
-              <a:t>R$ 254.20 average cumulative spend</a:t>
+              <a:t>About 3K customers</a:t>
             </a:r>
             <a:endParaRPr lang="en-US" sz="1450" dirty="0"/>
           </a:p>
@@ -8175,6 +8335,10 @@
             <a:prstDash val="solid"/>
           </a:ln>
         </p:spPr>
+        <p:txBody>
+          <a:bodyPr/>
+          <a:p/>
+        </p:txBody>
       </p:sp>
       <p:sp>
         <p:nvSpPr>
@@ -8256,7 +8420,7 @@
                 <a:ea typeface="Public Sans" pitchFamily="34" charset="-122"/>
                 <a:cs typeface="Public Sans" pitchFamily="34" charset="-120"/>
               </a:rPr>
-              <a:t>A 24-month observation window naturally undercounts long repurchase cycles. However, repeat buyers demonstrate </a:t>
+              <a:t>The observation period is limited, so the repeat-customer share may understate long-term repurchasing. Repeat customers did show higher average spending per customer, but the group is much smaller.</a:t>
             </a:r>
             <a:pPr algn="l" indent="0" marL="0">
               <a:lnSpc>
@@ -8264,34 +8428,12 @@
               </a:lnSpc>
               <a:buNone/>
             </a:pPr>
-            <a:r>
-              <a:rPr lang="en-US" sz="1450" b="1" dirty="0">
-                <a:solidFill>
-                  <a:srgbClr val="3A4756"/>
-                </a:solidFill>
-                <a:latin typeface="Public Sans Bold" pitchFamily="34" charset="0"/>
-                <a:ea typeface="Public Sans Bold" pitchFamily="34" charset="-122"/>
-                <a:cs typeface="Public Sans Bold" pitchFamily="34" charset="-120"/>
-              </a:rPr>
-              <a:t>86% higher cumulative customer value</a:t>
-            </a:r>
             <a:pPr algn="l" indent="0" marL="0">
               <a:lnSpc>
                 <a:spcPct val="121000"/>
               </a:lnSpc>
               <a:buNone/>
             </a:pPr>
-            <a:r>
-              <a:rPr lang="en-US" sz="1450" dirty="0">
-                <a:solidFill>
-                  <a:srgbClr val="3A4756"/>
-                </a:solidFill>
-                <a:latin typeface="Public Sans" pitchFamily="34" charset="0"/>
-                <a:ea typeface="Public Sans" pitchFamily="34" charset="-122"/>
-                <a:cs typeface="Public Sans" pitchFamily="34" charset="-120"/>
-              </a:rPr>
-              <a:t>, signaling substantial retention upside.</a:t>
-            </a:r>
             <a:endParaRPr lang="en-US" sz="1450" dirty="0"/>
           </a:p>
         </p:txBody>
@@ -8567,7 +8709,7 @@
                 <a:ea typeface="Public Sans" pitchFamily="34" charset="-122"/>
                 <a:cs typeface="Public Sans" pitchFamily="34" charset="-120"/>
               </a:rPr>
-              <a:t>From purchase approval to customer delivery</a:t>
+              <a:t>Across valid delivered orders</a:t>
             </a:r>
             <a:endParaRPr lang="en-US" sz="1250" dirty="0"/>
           </a:p>
@@ -8695,7 +8837,7 @@
                 <a:ea typeface="Public Sans Medium" pitchFamily="34" charset="-122"/>
                 <a:cs typeface="Public Sans Medium" pitchFamily="34" charset="-120"/>
               </a:rPr>
-              <a:t>STATE-LEVEL DISPARITY (MIN. 500 ORDERS THRESHOLD)</a:t>
+              <a:t>TOP 5 STATES BY LATE DELIVERY RATE (MIN. ORDER THRESHOLD APPLIED)</a:t>
             </a:r>
             <a:endParaRPr lang="en-US" sz="1200" dirty="0"/>
           </a:p>
@@ -8717,17 +8859,17 @@
         </p:nvGraphicFramePr>
         <p:xfrm>
           <a:off x="5272749" y="1832074"/>
-          <a:ext cx="9143771" cy="914400"/>
+          <a:ext cx="6309361" cy="3360000"/>
         </p:xfrm>
         <a:graphic>
           <a:graphicData uri="http://schemas.openxmlformats.org/drawingml/2006/table">
             <a:tbl>
               <a:tblPr/>
               <a:tblGrid>
-                <a:gridCol w="2145183"/>
-                <a:gridCol w="4164178"/>
+                <a:gridCol w="2700000"/>
+                <a:gridCol w="3609361"/>
               </a:tblGrid>
-              <a:tr h="559183">
+              <a:tr h="560000">
                 <a:tc>
                   <a:txBody>
                     <a:bodyPr/>
@@ -8810,7 +8952,7 @@
                           <a:ea typeface="Public Sans" pitchFamily="34" charset="-122"/>
                           <a:cs typeface="Public Sans" pitchFamily="34" charset="-120"/>
                         </a:rPr>
-                        <a:t>DELIVERED ORDERS · AVERAGE DAYS · LATE RATE</a:t>
+                        <a:t>LATE DELIVERY RATE</a:t>
                       </a:r>
                       <a:endParaRPr lang="en-US" sz="1150" dirty="0">
                         <a:latin typeface="Public Sans" charset="0"/>
@@ -8859,535 +9001,7 @@
                   </a:tcPr>
                 </a:tc>
               </a:tr>
-              <a:tr h="498363">
-                <a:tc>
-                  <a:txBody>
-                    <a:bodyPr/>
-                    <a:lstStyle/>
-                    <a:p>
-                      <a:pPr algn="l" indent="0" marL="0">
-                        <a:buNone/>
-                      </a:pPr>
-                      <a:r>
-                        <a:rPr lang="en-US" sz="1700" b="1" dirty="0">
-                          <a:solidFill>
-                            <a:srgbClr val="3A4756"/>
-                          </a:solidFill>
-                          <a:latin typeface="Public Sans" pitchFamily="34" charset="0"/>
-                          <a:ea typeface="Public Sans" pitchFamily="34" charset="-122"/>
-                          <a:cs typeface="Public Sans" pitchFamily="34" charset="-120"/>
-                        </a:rPr>
-                        <a:t>São Paulo (SP)</a:t>
-                      </a:r>
-                      <a:endParaRPr lang="en-US" sz="1700" dirty="0">
-                        <a:latin typeface="Public Sans" charset="0"/>
-                        <a:ea typeface="Public Sans" charset="0"/>
-                        <a:cs typeface="Public Sans" charset="0"/>
-                      </a:endParaRPr>
-                    </a:p>
-                  </a:txBody>
-                  <a:tcPr marL="161921" marR="161921" marT="86358" marB="86358" anchor="ctr">
-                    <a:lnL w="12700" cap="flat" cmpd="sng" algn="ctr">
-                      <a:solidFill>
-                        <a:srgbClr val="F9FAFC"/>
-                      </a:solidFill>
-                      <a:prstDash val="solid"/>
-                      <a:round/>
-                      <a:headEnd type="none" w="med" len="med"/>
-                      <a:tailEnd type="none" w="med" len="med"/>
-                    </a:lnL>
-                    <a:lnR w="12700" cap="flat" cmpd="sng" algn="ctr">
-                      <a:solidFill>
-                        <a:srgbClr val="F9FAFC"/>
-                      </a:solidFill>
-                      <a:prstDash val="solid"/>
-                      <a:round/>
-                      <a:headEnd type="none" w="med" len="med"/>
-                      <a:tailEnd type="none" w="med" len="med"/>
-                    </a:lnR>
-                    <a:lnT w="12700" cap="flat" cmpd="sng" algn="ctr">
-                      <a:solidFill>
-                        <a:srgbClr val="1B2632"/>
-                      </a:solidFill>
-                      <a:prstDash val="solid"/>
-                      <a:round/>
-                      <a:headEnd type="none" w="med" len="med"/>
-                      <a:tailEnd type="none" w="med" len="med"/>
-                    </a:lnT>
-                    <a:lnB w="12700" cap="flat" cmpd="sng" algn="ctr">
-                      <a:solidFill>
-                        <a:srgbClr val="1B2632"/>
-                      </a:solidFill>
-                      <a:prstDash val="solid"/>
-                      <a:round/>
-                      <a:headEnd type="none" w="med" len="med"/>
-                      <a:tailEnd type="none" w="med" len="med"/>
-                    </a:lnB>
-                  </a:tcPr>
-                </a:tc>
-                <a:tc>
-                  <a:txBody>
-                    <a:bodyPr/>
-                    <a:lstStyle/>
-                    <a:p>
-                      <a:pPr algn="l" indent="0" marL="0">
-                        <a:buNone/>
-                      </a:pPr>
-                      <a:r>
-                        <a:rPr lang="en-US" sz="1700" dirty="0">
-                          <a:solidFill>
-                            <a:srgbClr val="3A4756"/>
-                          </a:solidFill>
-                          <a:latin typeface="Public Sans" pitchFamily="34" charset="0"/>
-                          <a:ea typeface="Public Sans" pitchFamily="34" charset="-122"/>
-                          <a:cs typeface="Public Sans" pitchFamily="34" charset="-120"/>
-                        </a:rPr>
-                        <a:t>40,494 · 8.3 d · 5.4%</a:t>
-                      </a:r>
-                      <a:endParaRPr lang="en-US" sz="1700" dirty="0">
-                        <a:latin typeface="Public Sans" charset="0"/>
-                        <a:ea typeface="Public Sans" charset="0"/>
-                        <a:cs typeface="Public Sans" charset="0"/>
-                      </a:endParaRPr>
-                    </a:p>
-                  </a:txBody>
-                  <a:tcPr marL="161921" marR="161921" marT="86358" marB="86358" anchor="ctr">
-                    <a:lnL w="12700" cap="flat" cmpd="sng" algn="ctr">
-                      <a:solidFill>
-                        <a:srgbClr val="F9FAFC"/>
-                      </a:solidFill>
-                      <a:prstDash val="solid"/>
-                      <a:round/>
-                      <a:headEnd type="none" w="med" len="med"/>
-                      <a:tailEnd type="none" w="med" len="med"/>
-                    </a:lnL>
-                    <a:lnR w="12700" cap="flat" cmpd="sng" algn="ctr">
-                      <a:solidFill>
-                        <a:srgbClr val="F9FAFC"/>
-                      </a:solidFill>
-                      <a:prstDash val="solid"/>
-                      <a:round/>
-                      <a:headEnd type="none" w="med" len="med"/>
-                      <a:tailEnd type="none" w="med" len="med"/>
-                    </a:lnR>
-                    <a:lnT w="12700" cap="flat" cmpd="sng" algn="ctr">
-                      <a:solidFill>
-                        <a:srgbClr val="1B2632"/>
-                      </a:solidFill>
-                      <a:prstDash val="solid"/>
-                      <a:round/>
-                      <a:headEnd type="none" w="med" len="med"/>
-                      <a:tailEnd type="none" w="med" len="med"/>
-                    </a:lnT>
-                    <a:lnB w="12700" cap="flat" cmpd="sng" algn="ctr">
-                      <a:solidFill>
-                        <a:srgbClr val="1B2632"/>
-                      </a:solidFill>
-                      <a:prstDash val="solid"/>
-                      <a:round/>
-                      <a:headEnd type="none" w="med" len="med"/>
-                      <a:tailEnd type="none" w="med" len="med"/>
-                    </a:lnB>
-                  </a:tcPr>
-                </a:tc>
-              </a:tr>
-              <a:tr h="811391">
-                <a:tc>
-                  <a:txBody>
-                    <a:bodyPr/>
-                    <a:lstStyle/>
-                    <a:p>
-                      <a:pPr algn="l" indent="0" marL="0">
-                        <a:buNone/>
-                      </a:pPr>
-                      <a:r>
-                        <a:rPr lang="en-US" sz="1700" b="1" dirty="0">
-                          <a:solidFill>
-                            <a:srgbClr val="3A4756"/>
-                          </a:solidFill>
-                          <a:latin typeface="Public Sans" pitchFamily="34" charset="0"/>
-                          <a:ea typeface="Public Sans" pitchFamily="34" charset="-122"/>
-                          <a:cs typeface="Public Sans" pitchFamily="34" charset="-120"/>
-                        </a:rPr>
-                        <a:t>Minas Gerais (MG)</a:t>
-                      </a:r>
-                      <a:endParaRPr lang="en-US" sz="1700" dirty="0">
-                        <a:latin typeface="Public Sans" charset="0"/>
-                        <a:ea typeface="Public Sans" charset="0"/>
-                        <a:cs typeface="Public Sans" charset="0"/>
-                      </a:endParaRPr>
-                    </a:p>
-                  </a:txBody>
-                  <a:tcPr marL="161921" marR="161921" marT="86358" marB="86358" anchor="ctr">
-                    <a:lnL w="12700" cap="flat" cmpd="sng" algn="ctr">
-                      <a:solidFill>
-                        <a:srgbClr val="F9FAFC"/>
-                      </a:solidFill>
-                      <a:prstDash val="solid"/>
-                      <a:round/>
-                      <a:headEnd type="none" w="med" len="med"/>
-                      <a:tailEnd type="none" w="med" len="med"/>
-                    </a:lnL>
-                    <a:lnR w="12700" cap="flat" cmpd="sng" algn="ctr">
-                      <a:solidFill>
-                        <a:srgbClr val="F9FAFC"/>
-                      </a:solidFill>
-                      <a:prstDash val="solid"/>
-                      <a:round/>
-                      <a:headEnd type="none" w="med" len="med"/>
-                      <a:tailEnd type="none" w="med" len="med"/>
-                    </a:lnR>
-                    <a:lnT w="12700" cap="flat" cmpd="sng" algn="ctr">
-                      <a:solidFill>
-                        <a:srgbClr val="1B2632"/>
-                      </a:solidFill>
-                      <a:prstDash val="solid"/>
-                      <a:round/>
-                      <a:headEnd type="none" w="med" len="med"/>
-                      <a:tailEnd type="none" w="med" len="med"/>
-                    </a:lnT>
-                    <a:lnB w="12700" cap="flat" cmpd="sng" algn="ctr">
-                      <a:solidFill>
-                        <a:srgbClr val="1B2632"/>
-                      </a:solidFill>
-                      <a:prstDash val="solid"/>
-                      <a:round/>
-                      <a:headEnd type="none" w="med" len="med"/>
-                      <a:tailEnd type="none" w="med" len="med"/>
-                    </a:lnB>
-                  </a:tcPr>
-                </a:tc>
-                <a:tc>
-                  <a:txBody>
-                    <a:bodyPr/>
-                    <a:lstStyle/>
-                    <a:p>
-                      <a:pPr algn="l" indent="0" marL="0">
-                        <a:buNone/>
-                      </a:pPr>
-                      <a:r>
-                        <a:rPr lang="en-US" sz="1700" dirty="0">
-                          <a:solidFill>
-                            <a:srgbClr val="3A4756"/>
-                          </a:solidFill>
-                          <a:latin typeface="Public Sans" pitchFamily="34" charset="0"/>
-                          <a:ea typeface="Public Sans" pitchFamily="34" charset="-122"/>
-                          <a:cs typeface="Public Sans" pitchFamily="34" charset="-120"/>
-                        </a:rPr>
-                        <a:t>11,353 · 11.5 d · 7.1%</a:t>
-                      </a:r>
-                      <a:endParaRPr lang="en-US" sz="1700" dirty="0">
-                        <a:latin typeface="Public Sans" charset="0"/>
-                        <a:ea typeface="Public Sans" charset="0"/>
-                        <a:cs typeface="Public Sans" charset="0"/>
-                      </a:endParaRPr>
-                    </a:p>
-                  </a:txBody>
-                  <a:tcPr marL="161921" marR="161921" marT="86358" marB="86358" anchor="ctr">
-                    <a:lnL w="12700" cap="flat" cmpd="sng" algn="ctr">
-                      <a:solidFill>
-                        <a:srgbClr val="F9FAFC"/>
-                      </a:solidFill>
-                      <a:prstDash val="solid"/>
-                      <a:round/>
-                      <a:headEnd type="none" w="med" len="med"/>
-                      <a:tailEnd type="none" w="med" len="med"/>
-                    </a:lnL>
-                    <a:lnR w="12700" cap="flat" cmpd="sng" algn="ctr">
-                      <a:solidFill>
-                        <a:srgbClr val="F9FAFC"/>
-                      </a:solidFill>
-                      <a:prstDash val="solid"/>
-                      <a:round/>
-                      <a:headEnd type="none" w="med" len="med"/>
-                      <a:tailEnd type="none" w="med" len="med"/>
-                    </a:lnR>
-                    <a:lnT w="12700" cap="flat" cmpd="sng" algn="ctr">
-                      <a:solidFill>
-                        <a:srgbClr val="1B2632"/>
-                      </a:solidFill>
-                      <a:prstDash val="solid"/>
-                      <a:round/>
-                      <a:headEnd type="none" w="med" len="med"/>
-                      <a:tailEnd type="none" w="med" len="med"/>
-                    </a:lnT>
-                    <a:lnB w="12700" cap="flat" cmpd="sng" algn="ctr">
-                      <a:solidFill>
-                        <a:srgbClr val="1B2632"/>
-                      </a:solidFill>
-                      <a:prstDash val="solid"/>
-                      <a:round/>
-                      <a:headEnd type="none" w="med" len="med"/>
-                      <a:tailEnd type="none" w="med" len="med"/>
-                    </a:lnB>
-                  </a:tcPr>
-                </a:tc>
-              </a:tr>
-              <a:tr h="811391">
-                <a:tc>
-                  <a:txBody>
-                    <a:bodyPr/>
-                    <a:lstStyle/>
-                    <a:p>
-                      <a:pPr algn="l" indent="0" marL="0">
-                        <a:buNone/>
-                      </a:pPr>
-                      <a:r>
-                        <a:rPr lang="en-US" sz="1700" b="1" dirty="0">
-                          <a:solidFill>
-                            <a:srgbClr val="3A4756"/>
-                          </a:solidFill>
-                          <a:latin typeface="Public Sans" pitchFamily="34" charset="0"/>
-                          <a:ea typeface="Public Sans" pitchFamily="34" charset="-122"/>
-                          <a:cs typeface="Public Sans" pitchFamily="34" charset="-120"/>
-                        </a:rPr>
-                        <a:t>Rio de Janeiro (RJ)</a:t>
-                      </a:r>
-                      <a:endParaRPr lang="en-US" sz="1700" dirty="0">
-                        <a:latin typeface="Public Sans" charset="0"/>
-                        <a:ea typeface="Public Sans" charset="0"/>
-                        <a:cs typeface="Public Sans" charset="0"/>
-                      </a:endParaRPr>
-                    </a:p>
-                  </a:txBody>
-                  <a:tcPr marL="161921" marR="161921" marT="86358" marB="86358" anchor="ctr">
-                    <a:lnL w="12700" cap="flat" cmpd="sng" algn="ctr">
-                      <a:solidFill>
-                        <a:srgbClr val="F9FAFC"/>
-                      </a:solidFill>
-                      <a:prstDash val="solid"/>
-                      <a:round/>
-                      <a:headEnd type="none" w="med" len="med"/>
-                      <a:tailEnd type="none" w="med" len="med"/>
-                    </a:lnL>
-                    <a:lnR w="12700" cap="flat" cmpd="sng" algn="ctr">
-                      <a:solidFill>
-                        <a:srgbClr val="F9FAFC"/>
-                      </a:solidFill>
-                      <a:prstDash val="solid"/>
-                      <a:round/>
-                      <a:headEnd type="none" w="med" len="med"/>
-                      <a:tailEnd type="none" w="med" len="med"/>
-                    </a:lnR>
-                    <a:lnT w="12700" cap="flat" cmpd="sng" algn="ctr">
-                      <a:solidFill>
-                        <a:srgbClr val="1B2632"/>
-                      </a:solidFill>
-                      <a:prstDash val="solid"/>
-                      <a:round/>
-                      <a:headEnd type="none" w="med" len="med"/>
-                      <a:tailEnd type="none" w="med" len="med"/>
-                    </a:lnT>
-                    <a:lnB w="12700" cap="flat" cmpd="sng" algn="ctr">
-                      <a:solidFill>
-                        <a:srgbClr val="1B2632"/>
-                      </a:solidFill>
-                      <a:prstDash val="solid"/>
-                      <a:round/>
-                      <a:headEnd type="none" w="med" len="med"/>
-                      <a:tailEnd type="none" w="med" len="med"/>
-                    </a:lnB>
-                  </a:tcPr>
-                </a:tc>
-                <a:tc>
-                  <a:txBody>
-                    <a:bodyPr/>
-                    <a:lstStyle/>
-                    <a:p>
-                      <a:pPr algn="l" indent="0" marL="0">
-                        <a:buNone/>
-                      </a:pPr>
-                      <a:r>
-                        <a:rPr lang="en-US" sz="1700" dirty="0">
-                          <a:solidFill>
-                            <a:srgbClr val="3A4756"/>
-                          </a:solidFill>
-                          <a:latin typeface="Public Sans" pitchFamily="34" charset="0"/>
-                          <a:ea typeface="Public Sans" pitchFamily="34" charset="-122"/>
-                          <a:cs typeface="Public Sans" pitchFamily="34" charset="-120"/>
-                        </a:rPr>
-                        <a:t>12,350 · 14.9 d · 11.6%</a:t>
-                      </a:r>
-                      <a:endParaRPr lang="en-US" sz="1700" dirty="0">
-                        <a:latin typeface="Public Sans" charset="0"/>
-                        <a:ea typeface="Public Sans" charset="0"/>
-                        <a:cs typeface="Public Sans" charset="0"/>
-                      </a:endParaRPr>
-                    </a:p>
-                  </a:txBody>
-                  <a:tcPr marL="161921" marR="161921" marT="86358" marB="86358" anchor="ctr">
-                    <a:lnL w="12700" cap="flat" cmpd="sng" algn="ctr">
-                      <a:solidFill>
-                        <a:srgbClr val="F9FAFC"/>
-                      </a:solidFill>
-                      <a:prstDash val="solid"/>
-                      <a:round/>
-                      <a:headEnd type="none" w="med" len="med"/>
-                      <a:tailEnd type="none" w="med" len="med"/>
-                    </a:lnL>
-                    <a:lnR w="12700" cap="flat" cmpd="sng" algn="ctr">
-                      <a:solidFill>
-                        <a:srgbClr val="F9FAFC"/>
-                      </a:solidFill>
-                      <a:prstDash val="solid"/>
-                      <a:round/>
-                      <a:headEnd type="none" w="med" len="med"/>
-                      <a:tailEnd type="none" w="med" len="med"/>
-                    </a:lnR>
-                    <a:lnT w="12700" cap="flat" cmpd="sng" algn="ctr">
-                      <a:solidFill>
-                        <a:srgbClr val="1B2632"/>
-                      </a:solidFill>
-                      <a:prstDash val="solid"/>
-                      <a:round/>
-                      <a:headEnd type="none" w="med" len="med"/>
-                      <a:tailEnd type="none" w="med" len="med"/>
-                    </a:lnT>
-                    <a:lnB w="12700" cap="flat" cmpd="sng" algn="ctr">
-                      <a:solidFill>
-                        <a:srgbClr val="1B2632"/>
-                      </a:solidFill>
-                      <a:prstDash val="solid"/>
-                      <a:round/>
-                      <a:headEnd type="none" w="med" len="med"/>
-                      <a:tailEnd type="none" w="med" len="med"/>
-                    </a:lnB>
-                  </a:tcPr>
-                </a:tc>
-              </a:tr>
-              <a:tr h="498363">
-                <a:tc>
-                  <a:txBody>
-                    <a:bodyPr/>
-                    <a:lstStyle/>
-                    <a:p>
-                      <a:pPr algn="l" indent="0" marL="0">
-                        <a:buNone/>
-                      </a:pPr>
-                      <a:r>
-                        <a:rPr lang="en-US" sz="1700" b="1" dirty="0">
-                          <a:solidFill>
-                            <a:srgbClr val="3A4756"/>
-                          </a:solidFill>
-                          <a:latin typeface="Public Sans" pitchFamily="34" charset="0"/>
-                          <a:ea typeface="Public Sans" pitchFamily="34" charset="-122"/>
-                          <a:cs typeface="Public Sans" pitchFamily="34" charset="-120"/>
-                        </a:rPr>
-                        <a:t>Bahia (BA)</a:t>
-                      </a:r>
-                      <a:endParaRPr lang="en-US" sz="1700" dirty="0">
-                        <a:latin typeface="Public Sans" charset="0"/>
-                        <a:ea typeface="Public Sans" charset="0"/>
-                        <a:cs typeface="Public Sans" charset="0"/>
-                      </a:endParaRPr>
-                    </a:p>
-                  </a:txBody>
-                  <a:tcPr marL="161921" marR="161921" marT="86358" marB="86358" anchor="ctr">
-                    <a:lnL w="12700" cap="flat" cmpd="sng" algn="ctr">
-                      <a:solidFill>
-                        <a:srgbClr val="F9FAFC"/>
-                      </a:solidFill>
-                      <a:prstDash val="solid"/>
-                      <a:round/>
-                      <a:headEnd type="none" w="med" len="med"/>
-                      <a:tailEnd type="none" w="med" len="med"/>
-                    </a:lnL>
-                    <a:lnR w="12700" cap="flat" cmpd="sng" algn="ctr">
-                      <a:solidFill>
-                        <a:srgbClr val="F9FAFC"/>
-                      </a:solidFill>
-                      <a:prstDash val="solid"/>
-                      <a:round/>
-                      <a:headEnd type="none" w="med" len="med"/>
-                      <a:tailEnd type="none" w="med" len="med"/>
-                    </a:lnR>
-                    <a:lnT w="12700" cap="flat" cmpd="sng" algn="ctr">
-                      <a:solidFill>
-                        <a:srgbClr val="1B2632"/>
-                      </a:solidFill>
-                      <a:prstDash val="solid"/>
-                      <a:round/>
-                      <a:headEnd type="none" w="med" len="med"/>
-                      <a:tailEnd type="none" w="med" len="med"/>
-                    </a:lnT>
-                    <a:lnB w="12700" cap="flat" cmpd="sng" algn="ctr">
-                      <a:solidFill>
-                        <a:srgbClr val="1B2632"/>
-                      </a:solidFill>
-                      <a:prstDash val="solid"/>
-                      <a:round/>
-                      <a:headEnd type="none" w="med" len="med"/>
-                      <a:tailEnd type="none" w="med" len="med"/>
-                    </a:lnB>
-                  </a:tcPr>
-                </a:tc>
-                <a:tc>
-                  <a:txBody>
-                    <a:bodyPr/>
-                    <a:lstStyle/>
-                    <a:p>
-                      <a:pPr algn="l" indent="0" marL="0">
-                        <a:buNone/>
-                      </a:pPr>
-                      <a:r>
-                        <a:rPr lang="en-US" sz="1700" dirty="0">
-                          <a:solidFill>
-                            <a:srgbClr val="3A4756"/>
-                          </a:solidFill>
-                          <a:latin typeface="Public Sans" pitchFamily="34" charset="0"/>
-                          <a:ea typeface="Public Sans" pitchFamily="34" charset="-122"/>
-                          <a:cs typeface="Public Sans" pitchFamily="34" charset="-120"/>
-                        </a:rPr>
-                        <a:t>3,256 · 18.7 d · 15.9%</a:t>
-                      </a:r>
-                      <a:endParaRPr lang="en-US" sz="1700" dirty="0">
-                        <a:latin typeface="Public Sans" charset="0"/>
-                        <a:ea typeface="Public Sans" charset="0"/>
-                        <a:cs typeface="Public Sans" charset="0"/>
-                      </a:endParaRPr>
-                    </a:p>
-                  </a:txBody>
-                  <a:tcPr marL="161921" marR="161921" marT="86358" marB="86358" anchor="ctr">
-                    <a:lnL w="12700" cap="flat" cmpd="sng" algn="ctr">
-                      <a:solidFill>
-                        <a:srgbClr val="F9FAFC"/>
-                      </a:solidFill>
-                      <a:prstDash val="solid"/>
-                      <a:round/>
-                      <a:headEnd type="none" w="med" len="med"/>
-                      <a:tailEnd type="none" w="med" len="med"/>
-                    </a:lnL>
-                    <a:lnR w="12700" cap="flat" cmpd="sng" algn="ctr">
-                      <a:solidFill>
-                        <a:srgbClr val="F9FAFC"/>
-                      </a:solidFill>
-                      <a:prstDash val="solid"/>
-                      <a:round/>
-                      <a:headEnd type="none" w="med" len="med"/>
-                      <a:tailEnd type="none" w="med" len="med"/>
-                    </a:lnR>
-                    <a:lnT w="12700" cap="flat" cmpd="sng" algn="ctr">
-                      <a:solidFill>
-                        <a:srgbClr val="1B2632"/>
-                      </a:solidFill>
-                      <a:prstDash val="solid"/>
-                      <a:round/>
-                      <a:headEnd type="none" w="med" len="med"/>
-                      <a:tailEnd type="none" w="med" len="med"/>
-                    </a:lnT>
-                    <a:lnB w="12700" cap="flat" cmpd="sng" algn="ctr">
-                      <a:solidFill>
-                        <a:srgbClr val="1B2632"/>
-                      </a:solidFill>
-                      <a:prstDash val="solid"/>
-                      <a:round/>
-                      <a:headEnd type="none" w="med" len="med"/>
-                      <a:tailEnd type="none" w="med" len="med"/>
-                    </a:lnB>
-                  </a:tcPr>
-                </a:tc>
-              </a:tr>
-              <a:tr h="485664">
+              <a:tr h="560000">
                 <a:tc>
                   <a:txBody>
                     <a:bodyPr/>
@@ -9444,7 +9058,7 @@
                     </a:lnT>
                     <a:lnB w="12700" cap="flat" cmpd="sng" algn="ctr">
                       <a:solidFill>
-                        <a:srgbClr val="F9FAFC"/>
+                        <a:srgbClr val="1B2632"/>
                       </a:solidFill>
                       <a:prstDash val="solid"/>
                       <a:round/>
@@ -9470,7 +9084,7 @@
                           <a:ea typeface="Public Sans" pitchFamily="34" charset="-122"/>
                           <a:cs typeface="Public Sans" pitchFamily="34" charset="-120"/>
                         </a:rPr>
-                        <a:t>502 · 24.0 d · 23.1%</a:t>
+                        <a:t>23.93%</a:t>
                       </a:r>
                       <a:endParaRPr lang="en-US" sz="1700" dirty="0">
                         <a:latin typeface="Public Sans" charset="0"/>
@@ -9509,6 +9123,534 @@
                     </a:lnT>
                     <a:lnB w="12700" cap="flat" cmpd="sng" algn="ctr">
                       <a:solidFill>
+                        <a:srgbClr val="1B2632"/>
+                      </a:solidFill>
+                      <a:prstDash val="solid"/>
+                      <a:round/>
+                      <a:headEnd type="none" w="med" len="med"/>
+                      <a:tailEnd type="none" w="med" len="med"/>
+                    </a:lnB>
+                  </a:tcPr>
+                </a:tc>
+              </a:tr>
+              <a:tr h="560000">
+                <a:tc>
+                  <a:txBody>
+                    <a:bodyPr/>
+                    <a:lstStyle/>
+                    <a:p>
+                      <a:pPr algn="l" indent="0" marL="0">
+                        <a:buNone/>
+                      </a:pPr>
+                      <a:r>
+                        <a:rPr lang="en-US" sz="1700" b="1" dirty="0">
+                          <a:solidFill>
+                            <a:srgbClr val="3A4756"/>
+                          </a:solidFill>
+                          <a:latin typeface="Public Sans" pitchFamily="34" charset="0"/>
+                          <a:ea typeface="Public Sans" pitchFamily="34" charset="-122"/>
+                          <a:cs typeface="Public Sans" pitchFamily="34" charset="-120"/>
+                        </a:rPr>
+                        <a:t>Maranhão (MA)</a:t>
+                      </a:r>
+                      <a:endParaRPr lang="en-US" sz="1700" dirty="0">
+                        <a:latin typeface="Public Sans" charset="0"/>
+                        <a:ea typeface="Public Sans" charset="0"/>
+                        <a:cs typeface="Public Sans" charset="0"/>
+                      </a:endParaRPr>
+                    </a:p>
+                  </a:txBody>
+                  <a:tcPr marL="161921" marR="161921" marT="86358" marB="86358" anchor="ctr">
+                    <a:lnL w="12700" cap="flat" cmpd="sng" algn="ctr">
+                      <a:solidFill>
+                        <a:srgbClr val="F9FAFC"/>
+                      </a:solidFill>
+                      <a:prstDash val="solid"/>
+                      <a:round/>
+                      <a:headEnd type="none" w="med" len="med"/>
+                      <a:tailEnd type="none" w="med" len="med"/>
+                    </a:lnL>
+                    <a:lnR w="12700" cap="flat" cmpd="sng" algn="ctr">
+                      <a:solidFill>
+                        <a:srgbClr val="F9FAFC"/>
+                      </a:solidFill>
+                      <a:prstDash val="solid"/>
+                      <a:round/>
+                      <a:headEnd type="none" w="med" len="med"/>
+                      <a:tailEnd type="none" w="med" len="med"/>
+                    </a:lnR>
+                    <a:lnT w="12700" cap="flat" cmpd="sng" algn="ctr">
+                      <a:solidFill>
+                        <a:srgbClr val="1B2632"/>
+                      </a:solidFill>
+                      <a:prstDash val="solid"/>
+                      <a:round/>
+                      <a:headEnd type="none" w="med" len="med"/>
+                      <a:tailEnd type="none" w="med" len="med"/>
+                    </a:lnT>
+                    <a:lnB w="12700" cap="flat" cmpd="sng" algn="ctr">
+                      <a:solidFill>
+                        <a:srgbClr val="1B2632"/>
+                      </a:solidFill>
+                      <a:prstDash val="solid"/>
+                      <a:round/>
+                      <a:headEnd type="none" w="med" len="med"/>
+                      <a:tailEnd type="none" w="med" len="med"/>
+                    </a:lnB>
+                  </a:tcPr>
+                </a:tc>
+                <a:tc>
+                  <a:txBody>
+                    <a:bodyPr/>
+                    <a:lstStyle/>
+                    <a:p>
+                      <a:pPr algn="l" indent="0" marL="0">
+                        <a:buNone/>
+                      </a:pPr>
+                      <a:r>
+                        <a:rPr lang="en-US" sz="1700" dirty="0">
+                          <a:solidFill>
+                            <a:srgbClr val="3A4756"/>
+                          </a:solidFill>
+                          <a:latin typeface="Public Sans" pitchFamily="34" charset="0"/>
+                          <a:ea typeface="Public Sans" pitchFamily="34" charset="-122"/>
+                          <a:cs typeface="Public Sans" pitchFamily="34" charset="-120"/>
+                        </a:rPr>
+                        <a:t>19.67%</a:t>
+                      </a:r>
+                      <a:endParaRPr lang="en-US" sz="1700" dirty="0">
+                        <a:latin typeface="Public Sans" charset="0"/>
+                        <a:ea typeface="Public Sans" charset="0"/>
+                        <a:cs typeface="Public Sans" charset="0"/>
+                      </a:endParaRPr>
+                    </a:p>
+                  </a:txBody>
+                  <a:tcPr marL="161921" marR="161921" marT="86358" marB="86358" anchor="ctr">
+                    <a:lnL w="12700" cap="flat" cmpd="sng" algn="ctr">
+                      <a:solidFill>
+                        <a:srgbClr val="F9FAFC"/>
+                      </a:solidFill>
+                      <a:prstDash val="solid"/>
+                      <a:round/>
+                      <a:headEnd type="none" w="med" len="med"/>
+                      <a:tailEnd type="none" w="med" len="med"/>
+                    </a:lnL>
+                    <a:lnR w="12700" cap="flat" cmpd="sng" algn="ctr">
+                      <a:solidFill>
+                        <a:srgbClr val="F9FAFC"/>
+                      </a:solidFill>
+                      <a:prstDash val="solid"/>
+                      <a:round/>
+                      <a:headEnd type="none" w="med" len="med"/>
+                      <a:tailEnd type="none" w="med" len="med"/>
+                    </a:lnR>
+                    <a:lnT w="12700" cap="flat" cmpd="sng" algn="ctr">
+                      <a:solidFill>
+                        <a:srgbClr val="1B2632"/>
+                      </a:solidFill>
+                      <a:prstDash val="solid"/>
+                      <a:round/>
+                      <a:headEnd type="none" w="med" len="med"/>
+                      <a:tailEnd type="none" w="med" len="med"/>
+                    </a:lnT>
+                    <a:lnB w="12700" cap="flat" cmpd="sng" algn="ctr">
+                      <a:solidFill>
+                        <a:srgbClr val="1B2632"/>
+                      </a:solidFill>
+                      <a:prstDash val="solid"/>
+                      <a:round/>
+                      <a:headEnd type="none" w="med" len="med"/>
+                      <a:tailEnd type="none" w="med" len="med"/>
+                    </a:lnB>
+                  </a:tcPr>
+                </a:tc>
+              </a:tr>
+              <a:tr h="560000">
+                <a:tc>
+                  <a:txBody>
+                    <a:bodyPr/>
+                    <a:lstStyle/>
+                    <a:p>
+                      <a:pPr algn="l" indent="0" marL="0">
+                        <a:buNone/>
+                      </a:pPr>
+                      <a:r>
+                        <a:rPr lang="en-US" sz="1700" b="1" dirty="0">
+                          <a:solidFill>
+                            <a:srgbClr val="3A4756"/>
+                          </a:solidFill>
+                          <a:latin typeface="Public Sans" pitchFamily="34" charset="0"/>
+                          <a:ea typeface="Public Sans" pitchFamily="34" charset="-122"/>
+                          <a:cs typeface="Public Sans" pitchFamily="34" charset="-120"/>
+                        </a:rPr>
+                        <a:t>Piauí (PI)</a:t>
+                      </a:r>
+                      <a:endParaRPr lang="en-US" sz="1700" dirty="0">
+                        <a:latin typeface="Public Sans" charset="0"/>
+                        <a:ea typeface="Public Sans" charset="0"/>
+                        <a:cs typeface="Public Sans" charset="0"/>
+                      </a:endParaRPr>
+                    </a:p>
+                  </a:txBody>
+                  <a:tcPr marL="161921" marR="161921" marT="86358" marB="86358" anchor="ctr">
+                    <a:lnL w="12700" cap="flat" cmpd="sng" algn="ctr">
+                      <a:solidFill>
+                        <a:srgbClr val="F9FAFC"/>
+                      </a:solidFill>
+                      <a:prstDash val="solid"/>
+                      <a:round/>
+                      <a:headEnd type="none" w="med" len="med"/>
+                      <a:tailEnd type="none" w="med" len="med"/>
+                    </a:lnL>
+                    <a:lnR w="12700" cap="flat" cmpd="sng" algn="ctr">
+                      <a:solidFill>
+                        <a:srgbClr val="F9FAFC"/>
+                      </a:solidFill>
+                      <a:prstDash val="solid"/>
+                      <a:round/>
+                      <a:headEnd type="none" w="med" len="med"/>
+                      <a:tailEnd type="none" w="med" len="med"/>
+                    </a:lnR>
+                    <a:lnT w="12700" cap="flat" cmpd="sng" algn="ctr">
+                      <a:solidFill>
+                        <a:srgbClr val="1B2632"/>
+                      </a:solidFill>
+                      <a:prstDash val="solid"/>
+                      <a:round/>
+                      <a:headEnd type="none" w="med" len="med"/>
+                      <a:tailEnd type="none" w="med" len="med"/>
+                    </a:lnT>
+                    <a:lnB w="12700" cap="flat" cmpd="sng" algn="ctr">
+                      <a:solidFill>
+                        <a:srgbClr val="1B2632"/>
+                      </a:solidFill>
+                      <a:prstDash val="solid"/>
+                      <a:round/>
+                      <a:headEnd type="none" w="med" len="med"/>
+                      <a:tailEnd type="none" w="med" len="med"/>
+                    </a:lnB>
+                  </a:tcPr>
+                </a:tc>
+                <a:tc>
+                  <a:txBody>
+                    <a:bodyPr/>
+                    <a:lstStyle/>
+                    <a:p>
+                      <a:pPr algn="l" indent="0" marL="0">
+                        <a:buNone/>
+                      </a:pPr>
+                      <a:r>
+                        <a:rPr lang="en-US" sz="1700" dirty="0">
+                          <a:solidFill>
+                            <a:srgbClr val="3A4756"/>
+                          </a:solidFill>
+                          <a:latin typeface="Public Sans" pitchFamily="34" charset="0"/>
+                          <a:ea typeface="Public Sans" pitchFamily="34" charset="-122"/>
+                          <a:cs typeface="Public Sans" pitchFamily="34" charset="-120"/>
+                        </a:rPr>
+                        <a:t>15.97%</a:t>
+                      </a:r>
+                      <a:endParaRPr lang="en-US" sz="1700" dirty="0">
+                        <a:latin typeface="Public Sans" charset="0"/>
+                        <a:ea typeface="Public Sans" charset="0"/>
+                        <a:cs typeface="Public Sans" charset="0"/>
+                      </a:endParaRPr>
+                    </a:p>
+                  </a:txBody>
+                  <a:tcPr marL="161921" marR="161921" marT="86358" marB="86358" anchor="ctr">
+                    <a:lnL w="12700" cap="flat" cmpd="sng" algn="ctr">
+                      <a:solidFill>
+                        <a:srgbClr val="F9FAFC"/>
+                      </a:solidFill>
+                      <a:prstDash val="solid"/>
+                      <a:round/>
+                      <a:headEnd type="none" w="med" len="med"/>
+                      <a:tailEnd type="none" w="med" len="med"/>
+                    </a:lnL>
+                    <a:lnR w="12700" cap="flat" cmpd="sng" algn="ctr">
+                      <a:solidFill>
+                        <a:srgbClr val="F9FAFC"/>
+                      </a:solidFill>
+                      <a:prstDash val="solid"/>
+                      <a:round/>
+                      <a:headEnd type="none" w="med" len="med"/>
+                      <a:tailEnd type="none" w="med" len="med"/>
+                    </a:lnR>
+                    <a:lnT w="12700" cap="flat" cmpd="sng" algn="ctr">
+                      <a:solidFill>
+                        <a:srgbClr val="1B2632"/>
+                      </a:solidFill>
+                      <a:prstDash val="solid"/>
+                      <a:round/>
+                      <a:headEnd type="none" w="med" len="med"/>
+                      <a:tailEnd type="none" w="med" len="med"/>
+                    </a:lnT>
+                    <a:lnB w="12700" cap="flat" cmpd="sng" algn="ctr">
+                      <a:solidFill>
+                        <a:srgbClr val="1B2632"/>
+                      </a:solidFill>
+                      <a:prstDash val="solid"/>
+                      <a:round/>
+                      <a:headEnd type="none" w="med" len="med"/>
+                      <a:tailEnd type="none" w="med" len="med"/>
+                    </a:lnB>
+                  </a:tcPr>
+                </a:tc>
+              </a:tr>
+              <a:tr h="560000">
+                <a:tc>
+                  <a:txBody>
+                    <a:bodyPr/>
+                    <a:lstStyle/>
+                    <a:p>
+                      <a:pPr algn="l" indent="0" marL="0">
+                        <a:buNone/>
+                      </a:pPr>
+                      <a:r>
+                        <a:rPr lang="en-US" sz="1700" b="1" dirty="0">
+                          <a:solidFill>
+                            <a:srgbClr val="3A4756"/>
+                          </a:solidFill>
+                          <a:latin typeface="Public Sans" pitchFamily="34" charset="0"/>
+                          <a:ea typeface="Public Sans" pitchFamily="34" charset="-122"/>
+                          <a:cs typeface="Public Sans" pitchFamily="34" charset="-120"/>
+                        </a:rPr>
+                        <a:t>Ceará (CE)</a:t>
+                      </a:r>
+                      <a:endParaRPr lang="en-US" sz="1700" dirty="0">
+                        <a:latin typeface="Public Sans" charset="0"/>
+                        <a:ea typeface="Public Sans" charset="0"/>
+                        <a:cs typeface="Public Sans" charset="0"/>
+                      </a:endParaRPr>
+                    </a:p>
+                  </a:txBody>
+                  <a:tcPr marL="161921" marR="161921" marT="86358" marB="86358" anchor="ctr">
+                    <a:lnL w="12700" cap="flat" cmpd="sng" algn="ctr">
+                      <a:solidFill>
+                        <a:srgbClr val="F9FAFC"/>
+                      </a:solidFill>
+                      <a:prstDash val="solid"/>
+                      <a:round/>
+                      <a:headEnd type="none" w="med" len="med"/>
+                      <a:tailEnd type="none" w="med" len="med"/>
+                    </a:lnL>
+                    <a:lnR w="12700" cap="flat" cmpd="sng" algn="ctr">
+                      <a:solidFill>
+                        <a:srgbClr val="F9FAFC"/>
+                      </a:solidFill>
+                      <a:prstDash val="solid"/>
+                      <a:round/>
+                      <a:headEnd type="none" w="med" len="med"/>
+                      <a:tailEnd type="none" w="med" len="med"/>
+                    </a:lnR>
+                    <a:lnT w="12700" cap="flat" cmpd="sng" algn="ctr">
+                      <a:solidFill>
+                        <a:srgbClr val="1B2632"/>
+                      </a:solidFill>
+                      <a:prstDash val="solid"/>
+                      <a:round/>
+                      <a:headEnd type="none" w="med" len="med"/>
+                      <a:tailEnd type="none" w="med" len="med"/>
+                    </a:lnT>
+                    <a:lnB w="12700" cap="flat" cmpd="sng" algn="ctr">
+                      <a:solidFill>
+                        <a:srgbClr val="1B2632"/>
+                      </a:solidFill>
+                      <a:prstDash val="solid"/>
+                      <a:round/>
+                      <a:headEnd type="none" w="med" len="med"/>
+                      <a:tailEnd type="none" w="med" len="med"/>
+                    </a:lnB>
+                  </a:tcPr>
+                </a:tc>
+                <a:tc>
+                  <a:txBody>
+                    <a:bodyPr/>
+                    <a:lstStyle/>
+                    <a:p>
+                      <a:pPr algn="l" indent="0" marL="0">
+                        <a:buNone/>
+                      </a:pPr>
+                      <a:r>
+                        <a:rPr lang="en-US" sz="1700" dirty="0">
+                          <a:solidFill>
+                            <a:srgbClr val="3A4756"/>
+                          </a:solidFill>
+                          <a:latin typeface="Public Sans" pitchFamily="34" charset="0"/>
+                          <a:ea typeface="Public Sans" pitchFamily="34" charset="-122"/>
+                          <a:cs typeface="Public Sans" pitchFamily="34" charset="-120"/>
+                        </a:rPr>
+                        <a:t>15.32%</a:t>
+                      </a:r>
+                      <a:endParaRPr lang="en-US" sz="1700" dirty="0">
+                        <a:latin typeface="Public Sans" charset="0"/>
+                        <a:ea typeface="Public Sans" charset="0"/>
+                        <a:cs typeface="Public Sans" charset="0"/>
+                      </a:endParaRPr>
+                    </a:p>
+                  </a:txBody>
+                  <a:tcPr marL="161921" marR="161921" marT="86358" marB="86358" anchor="ctr">
+                    <a:lnL w="12700" cap="flat" cmpd="sng" algn="ctr">
+                      <a:solidFill>
+                        <a:srgbClr val="F9FAFC"/>
+                      </a:solidFill>
+                      <a:prstDash val="solid"/>
+                      <a:round/>
+                      <a:headEnd type="none" w="med" len="med"/>
+                      <a:tailEnd type="none" w="med" len="med"/>
+                    </a:lnL>
+                    <a:lnR w="12700" cap="flat" cmpd="sng" algn="ctr">
+                      <a:solidFill>
+                        <a:srgbClr val="F9FAFC"/>
+                      </a:solidFill>
+                      <a:prstDash val="solid"/>
+                      <a:round/>
+                      <a:headEnd type="none" w="med" len="med"/>
+                      <a:tailEnd type="none" w="med" len="med"/>
+                    </a:lnR>
+                    <a:lnT w="12700" cap="flat" cmpd="sng" algn="ctr">
+                      <a:solidFill>
+                        <a:srgbClr val="1B2632"/>
+                      </a:solidFill>
+                      <a:prstDash val="solid"/>
+                      <a:round/>
+                      <a:headEnd type="none" w="med" len="med"/>
+                      <a:tailEnd type="none" w="med" len="med"/>
+                    </a:lnT>
+                    <a:lnB w="12700" cap="flat" cmpd="sng" algn="ctr">
+                      <a:solidFill>
+                        <a:srgbClr val="1B2632"/>
+                      </a:solidFill>
+                      <a:prstDash val="solid"/>
+                      <a:round/>
+                      <a:headEnd type="none" w="med" len="med"/>
+                      <a:tailEnd type="none" w="med" len="med"/>
+                    </a:lnB>
+                  </a:tcPr>
+                </a:tc>
+              </a:tr>
+              <a:tr h="560000">
+                <a:tc>
+                  <a:txBody>
+                    <a:bodyPr/>
+                    <a:lstStyle/>
+                    <a:p>
+                      <a:pPr algn="l" indent="0" marL="0">
+                        <a:buNone/>
+                      </a:pPr>
+                      <a:r>
+                        <a:rPr lang="en-US" sz="1700" b="1" dirty="0">
+                          <a:solidFill>
+                            <a:srgbClr val="3A4756"/>
+                          </a:solidFill>
+                          <a:latin typeface="Public Sans" pitchFamily="34" charset="0"/>
+                          <a:ea typeface="Public Sans" pitchFamily="34" charset="-122"/>
+                          <a:cs typeface="Public Sans" pitchFamily="34" charset="-120"/>
+                        </a:rPr>
+                        <a:t>Sergipe (SE)</a:t>
+                      </a:r>
+                      <a:endParaRPr lang="en-US" sz="1700" dirty="0">
+                        <a:latin typeface="Public Sans" charset="0"/>
+                        <a:ea typeface="Public Sans" charset="0"/>
+                        <a:cs typeface="Public Sans" charset="0"/>
+                      </a:endParaRPr>
+                    </a:p>
+                  </a:txBody>
+                  <a:tcPr marL="161921" marR="161921" marT="86358" marB="86358" anchor="ctr">
+                    <a:lnL w="12700" cap="flat" cmpd="sng" algn="ctr">
+                      <a:solidFill>
+                        <a:srgbClr val="F9FAFC"/>
+                      </a:solidFill>
+                      <a:prstDash val="solid"/>
+                      <a:round/>
+                      <a:headEnd type="none" w="med" len="med"/>
+                      <a:tailEnd type="none" w="med" len="med"/>
+                    </a:lnL>
+                    <a:lnR w="12700" cap="flat" cmpd="sng" algn="ctr">
+                      <a:solidFill>
+                        <a:srgbClr val="F9FAFC"/>
+                      </a:solidFill>
+                      <a:prstDash val="solid"/>
+                      <a:round/>
+                      <a:headEnd type="none" w="med" len="med"/>
+                      <a:tailEnd type="none" w="med" len="med"/>
+                    </a:lnR>
+                    <a:lnT w="12700" cap="flat" cmpd="sng" algn="ctr">
+                      <a:solidFill>
+                        <a:srgbClr val="1B2632"/>
+                      </a:solidFill>
+                      <a:prstDash val="solid"/>
+                      <a:round/>
+                      <a:headEnd type="none" w="med" len="med"/>
+                      <a:tailEnd type="none" w="med" len="med"/>
+                    </a:lnT>
+                    <a:lnB w="12700" cap="flat" cmpd="sng" algn="ctr">
+                      <a:solidFill>
+                        <a:srgbClr val="F9FAFC"/>
+                      </a:solidFill>
+                      <a:prstDash val="solid"/>
+                      <a:round/>
+                      <a:headEnd type="none" w="med" len="med"/>
+                      <a:tailEnd type="none" w="med" len="med"/>
+                    </a:lnB>
+                  </a:tcPr>
+                </a:tc>
+                <a:tc>
+                  <a:txBody>
+                    <a:bodyPr/>
+                    <a:lstStyle/>
+                    <a:p>
+                      <a:pPr algn="l" indent="0" marL="0">
+                        <a:buNone/>
+                      </a:pPr>
+                      <a:r>
+                        <a:rPr lang="en-US" sz="1700" dirty="0">
+                          <a:solidFill>
+                            <a:srgbClr val="3A4756"/>
+                          </a:solidFill>
+                          <a:latin typeface="Public Sans" pitchFamily="34" charset="0"/>
+                          <a:ea typeface="Public Sans" pitchFamily="34" charset="-122"/>
+                          <a:cs typeface="Public Sans" pitchFamily="34" charset="-120"/>
+                        </a:rPr>
+                        <a:t>15.22%</a:t>
+                      </a:r>
+                      <a:endParaRPr lang="en-US" sz="1700" dirty="0">
+                        <a:latin typeface="Public Sans" charset="0"/>
+                        <a:ea typeface="Public Sans" charset="0"/>
+                        <a:cs typeface="Public Sans" charset="0"/>
+                      </a:endParaRPr>
+                    </a:p>
+                  </a:txBody>
+                  <a:tcPr marL="161921" marR="161921" marT="86358" marB="86358" anchor="ctr">
+                    <a:lnL w="12700" cap="flat" cmpd="sng" algn="ctr">
+                      <a:solidFill>
+                        <a:srgbClr val="F9FAFC"/>
+                      </a:solidFill>
+                      <a:prstDash val="solid"/>
+                      <a:round/>
+                      <a:headEnd type="none" w="med" len="med"/>
+                      <a:tailEnd type="none" w="med" len="med"/>
+                    </a:lnL>
+                    <a:lnR w="12700" cap="flat" cmpd="sng" algn="ctr">
+                      <a:solidFill>
+                        <a:srgbClr val="F9FAFC"/>
+                      </a:solidFill>
+                      <a:prstDash val="solid"/>
+                      <a:round/>
+                      <a:headEnd type="none" w="med" len="med"/>
+                      <a:tailEnd type="none" w="med" len="med"/>
+                    </a:lnR>
+                    <a:lnT w="12700" cap="flat" cmpd="sng" algn="ctr">
+                      <a:solidFill>
+                        <a:srgbClr val="1B2632"/>
+                      </a:solidFill>
+                      <a:prstDash val="solid"/>
+                      <a:round/>
+                      <a:headEnd type="none" w="med" len="med"/>
+                      <a:tailEnd type="none" w="med" len="med"/>
+                    </a:lnT>
+                    <a:lnB w="12700" cap="flat" cmpd="sng" algn="ctr">
+                      <a:solidFill>
                         <a:srgbClr val="F9FAFC"/>
                       </a:solidFill>
                       <a:prstDash val="solid"/>
@@ -9561,7 +9703,7 @@
                 <a:ea typeface="Public Sans" pitchFamily="34" charset="-122"/>
                 <a:cs typeface="Public Sans" pitchFamily="34" charset="-120"/>
               </a:rPr>
-              <a:t>Late-delivery rates vary by state; Northeast states face delays exceeding 3 weeks.</a:t>
+              <a:t>Late-delivery rates vary widely by state; Alagoas (23.93%) and Maranhão (19.67%) are highest, against 8.11% nationwide.</a:t>
             </a:r>
             <a:endParaRPr lang="en-US" sz="1250" dirty="0"/>
           </a:p>
@@ -9738,7 +9880,7 @@
                 <a:ea typeface="Public Sans" pitchFamily="34" charset="-122"/>
                 <a:cs typeface="Public Sans" pitchFamily="34" charset="-120"/>
               </a:rPr>
-              <a:t>Review scores drop by 1.72 points on a 5-point scale when orders miss the estimated arrival date.</a:t>
+              <a:t>Late orders scored 1.72 points lower on a 5-point scale than on-time orders.</a:t>
             </a:r>
             <a:endParaRPr lang="en-US" sz="1250" dirty="0"/>
           </a:p>
@@ -9763,6 +9905,10 @@
           </a:solidFill>
           <a:ln/>
         </p:spPr>
+        <p:txBody>
+          <a:bodyPr/>
+          <a:p/>
+        </p:txBody>
       </p:sp>
       <p:sp>
         <p:nvSpPr>
@@ -9886,7 +10032,7 @@
                 <a:ea typeface="Public Sans" pitchFamily="34" charset="-122"/>
                 <a:cs typeface="Public Sans" pitchFamily="34" charset="-120"/>
               </a:rPr>
-              <a:t>A 40% reduction in customer satisfaction between prompt and delayed deliveries.</a:t>
+              <a:t>Late orders scored about 40% lower on average than on-time orders.</a:t>
             </a:r>
             <a:endParaRPr lang="en-US" sz="1450" dirty="0"/>
           </a:p>
@@ -9916,6 +10062,10 @@
             <a:prstDash val="solid"/>
           </a:ln>
         </p:spPr>
+        <p:txBody>
+          <a:bodyPr/>
+          <a:p/>
+        </p:txBody>
       </p:sp>
       <p:sp>
         <p:nvSpPr>
@@ -9997,7 +10147,7 @@
                 <a:ea typeface="Public Sans" pitchFamily="34" charset="-122"/>
                 <a:cs typeface="Public Sans" pitchFamily="34" charset="-120"/>
               </a:rPr>
-              <a:t>This data demonstrates a </a:t>
+              <a:t>This shows a strong association in the data, not proof that late delivery alone caused the lower scores. Other factors may also play a part.</a:t>
             </a:r>
             <a:pPr algn="l" indent="0" marL="0">
               <a:lnSpc>
@@ -10005,34 +10155,12 @@
               </a:lnSpc>
               <a:buNone/>
             </a:pPr>
-            <a:r>
-              <a:rPr lang="en-US" sz="1450" b="1" dirty="0">
-                <a:solidFill>
-                  <a:srgbClr val="3A4756"/>
-                </a:solidFill>
-                <a:latin typeface="Public Sans Bold" pitchFamily="34" charset="0"/>
-                <a:ea typeface="Public Sans Bold" pitchFamily="34" charset="-122"/>
-                <a:cs typeface="Public Sans Bold" pitchFamily="34" charset="-120"/>
-              </a:rPr>
-              <a:t>strong statistical association</a:t>
-            </a:r>
             <a:pPr algn="l" indent="0" marL="0">
               <a:lnSpc>
                 <a:spcPct val="121000"/>
               </a:lnSpc>
               <a:buNone/>
             </a:pPr>
-            <a:r>
-              <a:rPr lang="en-US" sz="1450" dirty="0">
-                <a:solidFill>
-                  <a:srgbClr val="3A4756"/>
-                </a:solidFill>
-                <a:latin typeface="Public Sans" pitchFamily="34" charset="0"/>
-                <a:ea typeface="Public Sans" pitchFamily="34" charset="-122"/>
-                <a:cs typeface="Public Sans" pitchFamily="34" charset="-120"/>
-              </a:rPr>
-              <a:t> rather than strict single-factor causality. Delayed orders frequently encounter damaged parcels, seller responsiveness issues, or stockout friction.</a:t>
-            </a:r>
             <a:endParaRPr lang="en-US" sz="1450" dirty="0"/>
           </a:p>
         </p:txBody>
